--- a/assets/pptx/catalog-66.pptx
+++ b/assets/pptx/catalog-66.pptx
@@ -3802,7 +3802,7 @@
                 <a:ea typeface="Ebrima"/>
                 <a:cs typeface="Ebrima"/>
               </a:rPr>
-              <a:t>አይሏል ጨምሯል በላዬ (3X)</a:t>
+              <a:t>አይሏል ጨምሯል በላዬ 3X</a:t>
             </a:r>
           </a:p>
         </p:txBody>
@@ -3936,7 +3936,7 @@
                 <a:ea typeface="Ebrima"/>
                 <a:cs typeface="Ebrima"/>
               </a:rPr>
-              <a:t>የእግዚአብሔር በግ ይወደኛል (3X)</a:t>
+              <a:t>የእግዚአብሔር በግ ይወደኛል 3X</a:t>
             </a:r>
           </a:p>
         </p:txBody>
@@ -4472,7 +4472,7 @@
                 <a:ea typeface="Ebrima"/>
                 <a:cs typeface="Ebrima"/>
               </a:rPr>
-              <a:t>ይወደኛል (4X), ከፍ..., ፍቅርህ..., ከፍ..., ፍቅርህ...</a:t>
+              <a:t>ይወደኛል 4X, ከፍ..., ፍቅርህ..., ከፍ..., ፍቅርህ...</a:t>
             </a:r>
           </a:p>
         </p:txBody>
@@ -4539,7 +4539,7 @@
                 <a:ea typeface="Ebrima"/>
                 <a:cs typeface="Ebrima"/>
               </a:rPr>
-              <a:t>በእኔ ቦታ ታርዶልኛል ይወደኛል (2X)</a:t>
+              <a:t>በእኔ ቦታ ታርዶልኛል ይወደኛል 2X</a:t>
             </a:r>
           </a:p>
         </p:txBody>
@@ -4606,7 +4606,7 @@
                 <a:ea typeface="Ebrima"/>
                 <a:cs typeface="Ebrima"/>
               </a:rPr>
-              <a:t>ከፍ ከፍ ከፍ ያለ ነው (3X)</a:t>
+              <a:t>ከፍ ከፍ ከፍ ያለ ነው 3X</a:t>
             </a:r>
           </a:p>
         </p:txBody>
@@ -4807,7 +4807,7 @@
                 <a:ea typeface="Ebrima"/>
                 <a:cs typeface="Ebrima"/>
               </a:rPr>
-              <a:t>ፍቅርህ በላዬ (2X)</a:t>
+              <a:t>ፍቅርህ በላዬ 2X</a:t>
             </a:r>
           </a:p>
         </p:txBody>
